--- a/skills/beautiful-slides/charts/funnel/example-editorial-magazine.pptx
+++ b/skills/beautiful-slides/charts/funnel/example-editorial-magazine.pptx
@@ -3098,7 +3098,50 @@
       <p:grpSpPr/>
       <p:sp>
         <p:nvSpPr>
-          <p:cNvPr id="2" name="TextBox 1"/>
+          <p:cNvPr id="2" name="Rectangle 1"/>
+          <p:cNvSpPr/>
+          <p:nvPr/>
+        </p:nvSpPr>
+        <p:spPr>
+          <a:xfrm>
+            <a:off x="548640" y="548640"/>
+            <a:ext cx="11094415" cy="5760720"/>
+          </a:xfrm>
+          <a:prstGeom prst="rect">
+            <a:avLst/>
+          </a:prstGeom>
+          <a:solidFill>
+            <a:srgbClr val="F6F1E8"/>
+          </a:solidFill>
+          <a:ln>
+            <a:noFill/>
+          </a:ln>
+        </p:spPr>
+        <p:style>
+          <a:lnRef idx="1">
+            <a:schemeClr val="accent1"/>
+          </a:lnRef>
+          <a:fillRef idx="3">
+            <a:schemeClr val="accent1"/>
+          </a:fillRef>
+          <a:effectRef idx="2">
+            <a:schemeClr val="accent1"/>
+          </a:effectRef>
+          <a:fontRef idx="minor">
+            <a:schemeClr val="lt1"/>
+          </a:fontRef>
+        </p:style>
+        <p:txBody>
+          <a:bodyPr rtlCol="0" anchor="ctr"/>
+          <a:lstStyle/>
+          <a:p>
+            <a:pPr algn="ctr"/>
+          </a:p>
+        </p:txBody>
+      </p:sp>
+      <p:sp>
+        <p:nvSpPr>
+          <p:cNvPr id="3" name="TextBox 2"/>
           <p:cNvSpPr txBox="1"/>
           <p:nvPr/>
         </p:nvSpPr>
@@ -3133,7 +3176,7 @@
       </p:sp>
       <p:sp>
         <p:nvSpPr>
-          <p:cNvPr id="3" name="Freeform 2"/>
+          <p:cNvPr id="4" name="Freeform 3"/>
           <p:cNvSpPr/>
           <p:nvPr/>
         </p:nvSpPr>
@@ -3197,7 +3240,7 @@
       </p:sp>
       <p:sp>
         <p:nvSpPr>
-          <p:cNvPr id="4" name="TextBox 3"/>
+          <p:cNvPr id="5" name="TextBox 4"/>
           <p:cNvSpPr txBox="1"/>
           <p:nvPr/>
         </p:nvSpPr>
@@ -3232,7 +3275,7 @@
       </p:sp>
       <p:sp>
         <p:nvSpPr>
-          <p:cNvPr id="5" name="TextBox 4"/>
+          <p:cNvPr id="6" name="TextBox 5"/>
           <p:cNvSpPr txBox="1"/>
           <p:nvPr/>
         </p:nvSpPr>
@@ -3267,7 +3310,7 @@
       </p:sp>
       <p:sp>
         <p:nvSpPr>
-          <p:cNvPr id="6" name="TextBox 5"/>
+          <p:cNvPr id="7" name="TextBox 6"/>
           <p:cNvSpPr txBox="1"/>
           <p:nvPr/>
         </p:nvSpPr>
@@ -3291,7 +3334,7 @@
             <a:r>
               <a:rPr sz="1200" b="0">
                 <a:solidFill>
-                  <a:srgbClr val="6F675F"/>
+                  <a:srgbClr val="181514"/>
                 </a:solidFill>
                 <a:latin typeface="IBM Plex Mono"/>
               </a:rPr>
@@ -3302,7 +3345,7 @@
       </p:sp>
       <p:sp>
         <p:nvSpPr>
-          <p:cNvPr id="7" name="Freeform 6"/>
+          <p:cNvPr id="8" name="Freeform 7"/>
           <p:cNvSpPr/>
           <p:nvPr/>
         </p:nvSpPr>
@@ -3366,7 +3409,7 @@
       </p:sp>
       <p:sp>
         <p:nvSpPr>
-          <p:cNvPr id="8" name="TextBox 7"/>
+          <p:cNvPr id="9" name="TextBox 8"/>
           <p:cNvSpPr txBox="1"/>
           <p:nvPr/>
         </p:nvSpPr>
@@ -3401,7 +3444,7 @@
       </p:sp>
       <p:sp>
         <p:nvSpPr>
-          <p:cNvPr id="9" name="TextBox 8"/>
+          <p:cNvPr id="10" name="TextBox 9"/>
           <p:cNvSpPr txBox="1"/>
           <p:nvPr/>
         </p:nvSpPr>
@@ -3436,7 +3479,7 @@
       </p:sp>
       <p:sp>
         <p:nvSpPr>
-          <p:cNvPr id="10" name="TextBox 9"/>
+          <p:cNvPr id="11" name="TextBox 10"/>
           <p:cNvSpPr txBox="1"/>
           <p:nvPr/>
         </p:nvSpPr>
@@ -3460,7 +3503,7 @@
             <a:r>
               <a:rPr sz="1200" b="0">
                 <a:solidFill>
-                  <a:srgbClr val="6F675F"/>
+                  <a:srgbClr val="181514"/>
                 </a:solidFill>
                 <a:latin typeface="IBM Plex Mono"/>
               </a:rPr>
@@ -3471,7 +3514,7 @@
       </p:sp>
       <p:sp>
         <p:nvSpPr>
-          <p:cNvPr id="11" name="Freeform 10"/>
+          <p:cNvPr id="12" name="Freeform 11"/>
           <p:cNvSpPr/>
           <p:nvPr/>
         </p:nvSpPr>
@@ -3535,7 +3578,7 @@
       </p:sp>
       <p:sp>
         <p:nvSpPr>
-          <p:cNvPr id="12" name="TextBox 11"/>
+          <p:cNvPr id="13" name="TextBox 12"/>
           <p:cNvSpPr txBox="1"/>
           <p:nvPr/>
         </p:nvSpPr>
@@ -3570,7 +3613,7 @@
       </p:sp>
       <p:sp>
         <p:nvSpPr>
-          <p:cNvPr id="13" name="TextBox 12"/>
+          <p:cNvPr id="14" name="TextBox 13"/>
           <p:cNvSpPr txBox="1"/>
           <p:nvPr/>
         </p:nvSpPr>
@@ -3605,7 +3648,7 @@
       </p:sp>
       <p:sp>
         <p:nvSpPr>
-          <p:cNvPr id="14" name="TextBox 13"/>
+          <p:cNvPr id="15" name="TextBox 14"/>
           <p:cNvSpPr txBox="1"/>
           <p:nvPr/>
         </p:nvSpPr>
@@ -3629,7 +3672,7 @@
             <a:r>
               <a:rPr sz="1200" b="0">
                 <a:solidFill>
-                  <a:srgbClr val="6F675F"/>
+                  <a:srgbClr val="181514"/>
                 </a:solidFill>
                 <a:latin typeface="IBM Plex Mono"/>
               </a:rPr>
@@ -3640,7 +3683,7 @@
       </p:sp>
       <p:sp>
         <p:nvSpPr>
-          <p:cNvPr id="15" name="Freeform 14"/>
+          <p:cNvPr id="16" name="Freeform 15"/>
           <p:cNvSpPr/>
           <p:nvPr/>
         </p:nvSpPr>
@@ -3704,7 +3747,7 @@
       </p:sp>
       <p:sp>
         <p:nvSpPr>
-          <p:cNvPr id="16" name="TextBox 15"/>
+          <p:cNvPr id="17" name="TextBox 16"/>
           <p:cNvSpPr txBox="1"/>
           <p:nvPr/>
         </p:nvSpPr>
@@ -3739,7 +3782,7 @@
       </p:sp>
       <p:sp>
         <p:nvSpPr>
-          <p:cNvPr id="17" name="TextBox 16"/>
+          <p:cNvPr id="18" name="TextBox 17"/>
           <p:cNvSpPr txBox="1"/>
           <p:nvPr/>
         </p:nvSpPr>
@@ -3774,7 +3817,7 @@
       </p:sp>
       <p:sp>
         <p:nvSpPr>
-          <p:cNvPr id="18" name="TextBox 17"/>
+          <p:cNvPr id="19" name="TextBox 18"/>
           <p:cNvSpPr txBox="1"/>
           <p:nvPr/>
         </p:nvSpPr>
@@ -3798,7 +3841,7 @@
             <a:r>
               <a:rPr sz="1200" b="0">
                 <a:solidFill>
-                  <a:srgbClr val="6F675F"/>
+                  <a:srgbClr val="181514"/>
                 </a:solidFill>
                 <a:latin typeface="IBM Plex Mono"/>
               </a:rPr>
@@ -3809,7 +3852,7 @@
       </p:sp>
       <p:sp>
         <p:nvSpPr>
-          <p:cNvPr id="19" name="Freeform 18"/>
+          <p:cNvPr id="20" name="Freeform 19"/>
           <p:cNvSpPr/>
           <p:nvPr/>
         </p:nvSpPr>
@@ -3873,7 +3916,7 @@
       </p:sp>
       <p:sp>
         <p:nvSpPr>
-          <p:cNvPr id="20" name="TextBox 19"/>
+          <p:cNvPr id="21" name="TextBox 20"/>
           <p:cNvSpPr txBox="1"/>
           <p:nvPr/>
         </p:nvSpPr>
@@ -3908,7 +3951,7 @@
       </p:sp>
       <p:sp>
         <p:nvSpPr>
-          <p:cNvPr id="21" name="TextBox 20"/>
+          <p:cNvPr id="22" name="TextBox 21"/>
           <p:cNvSpPr txBox="1"/>
           <p:nvPr/>
         </p:nvSpPr>
@@ -3943,7 +3986,7 @@
       </p:sp>
       <p:sp>
         <p:nvSpPr>
-          <p:cNvPr id="22" name="TextBox 21"/>
+          <p:cNvPr id="23" name="TextBox 22"/>
           <p:cNvSpPr txBox="1"/>
           <p:nvPr/>
         </p:nvSpPr>
@@ -3967,7 +4010,7 @@
             <a:r>
               <a:rPr sz="1200" b="0">
                 <a:solidFill>
-                  <a:srgbClr val="6F675F"/>
+                  <a:srgbClr val="181514"/>
                 </a:solidFill>
                 <a:latin typeface="IBM Plex Mono"/>
               </a:rPr>
@@ -3978,7 +4021,7 @@
       </p:sp>
       <p:sp>
         <p:nvSpPr>
-          <p:cNvPr id="23" name="Freeform 22"/>
+          <p:cNvPr id="24" name="Freeform 23"/>
           <p:cNvSpPr/>
           <p:nvPr/>
         </p:nvSpPr>
@@ -4042,7 +4085,7 @@
       </p:sp>
       <p:sp>
         <p:nvSpPr>
-          <p:cNvPr id="24" name="TextBox 23"/>
+          <p:cNvPr id="25" name="TextBox 24"/>
           <p:cNvSpPr txBox="1"/>
           <p:nvPr/>
         </p:nvSpPr>
@@ -4077,7 +4120,7 @@
       </p:sp>
       <p:sp>
         <p:nvSpPr>
-          <p:cNvPr id="25" name="TextBox 24"/>
+          <p:cNvPr id="26" name="TextBox 25"/>
           <p:cNvSpPr txBox="1"/>
           <p:nvPr/>
         </p:nvSpPr>
